--- a/the_reading_room_presentation.pptx
+++ b/the_reading_room_presentation.pptx
@@ -4,6 +4,9 @@
   <p:sldMasterIdLst>
     <p:sldMasterId id="2147483648" r:id="rId1"/>
   </p:sldMasterIdLst>
+  <p:notesMasterIdLst>
+    <p:notesMasterId r:id="rId12"/>
+  </p:notesMasterIdLst>
   <p:sldIdLst>
     <p:sldId id="256" r:id="rId2"/>
     <p:sldId id="257" r:id="rId3"/>
@@ -16,10 +19,7 @@
     <p:sldId id="264" r:id="rId10"/>
     <p:sldId id="265" r:id="rId11"/>
   </p:sldIdLst>
-  <p:notesMasterIdLst>
-    <p:notesMasterId r:id="rId12"/>
-  </p:notesMasterIdLst>
-  <p:sldSz cx="9144000" cy="5143500"/>
+  <p:sldSz cx="9144000" cy="5143500" type="screen16x9"/>
   <p:notesSz cx="5143500" cy="9144000"/>
   <p:defaultTextStyle>
     <a:lvl1pPr marL="0" algn="l" defTabSz="914400" rtl="0" eaLnBrk="1" latinLnBrk="0" hangingPunct="1">
@@ -113,6 +113,11 @@
       </a:defRPr>
     </a:lvl9pPr>
   </p:defaultTextStyle>
+  <p:extLst>
+    <p:ext uri="{EFAFB233-063F-42B5-8137-9DF3F51BA10A}">
+      <p15:sldGuideLst xmlns:p15="http://schemas.microsoft.com/office/powerpoint/2012/main"/>
+    </p:ext>
+  </p:extLst>
 </p:presentation>
 </file>
 
@@ -138,234 +143,10 @@
           <a:chExt cx="0" cy="0"/>
         </a:xfrm>
       </p:grpSpPr>
-      <p:sp>
-        <p:nvSpPr>
-          <p:cNvPr id="2" name="Header Placeholder 1"/>
-          <p:cNvSpPr>
-            <a:spLocks noGrp="1"/>
-          </p:cNvSpPr>
-          <p:nvPr>
-            <p:ph type="hdr" sz="quarter"/>
-          </p:nvPr>
-        </p:nvSpPr>
-        <p:spPr>
-          <a:xfrm>
-            <a:off x="0" y="0"/>
-            <a:ext cx="2971800" cy="458788"/>
-          </a:xfrm>
-          <a:prstGeom prst="rect">
-            <a:avLst/>
-          </a:prstGeom>
-        </p:spPr>
-        <p:txBody>
-          <a:bodyPr vert="horz" lIns="91440" tIns="45720" rIns="91440" bIns="45720" rtlCol="0"/>
-          <a:lstStyle>
-            <a:lvl1pPr algn="l">
-              <a:defRPr sz="1200"/>
-            </a:lvl1pPr>
-          </a:lstStyle>
-          <a:p>
-            <a:endParaRPr lang="en-US"/>
-          </a:p>
-        </p:txBody>
-      </p:sp>
-      <p:sp>
-        <p:nvSpPr>
-          <p:cNvPr id="3" name="Date Placeholder 2"/>
-          <p:cNvSpPr>
-            <a:spLocks noGrp="1"/>
-          </p:cNvSpPr>
-          <p:nvPr>
-            <p:ph type="dt" idx="1"/>
-          </p:nvPr>
-        </p:nvSpPr>
-        <p:spPr>
-          <a:xfrm>
-            <a:off x="3884613" y="0"/>
-            <a:ext cx="2971800" cy="458788"/>
-          </a:xfrm>
-          <a:prstGeom prst="rect">
-            <a:avLst/>
-          </a:prstGeom>
-        </p:spPr>
-        <p:txBody>
-          <a:bodyPr vert="horz" lIns="91440" tIns="45720" rIns="91440" bIns="45720" rtlCol="0"/>
-          <a:lstStyle>
-            <a:lvl1pPr algn="r">
-              <a:defRPr sz="1200"/>
-            </a:lvl1pPr>
-          </a:lstStyle>
-          <a:p>
-            <a:fld id="{5282F153-3F37-0F45-9E97-73ACFA13230C}" type="datetimeFigureOut">
-              <a:rPr lang="en-US"/>
-              <a:t>7/23/19</a:t>
-            </a:fld>
-            <a:endParaRPr lang="en-US"/>
-          </a:p>
-        </p:txBody>
-      </p:sp>
-      <p:sp>
-        <p:nvSpPr>
-          <p:cNvPr id="4" name="Slide Image Placeholder 3"/>
-          <p:cNvSpPr>
-            <a:spLocks noGrp="1" noRot="1" noChangeAspect="1"/>
-          </p:cNvSpPr>
-          <p:nvPr>
-            <p:ph type="sldImg" idx="2"/>
-          </p:nvPr>
-        </p:nvSpPr>
-        <p:spPr>
-          <a:xfrm>
-            <a:off x="685800" y="1143000"/>
-            <a:ext cx="5486400" cy="3086100"/>
-          </a:xfrm>
-          <a:prstGeom prst="rect">
-            <a:avLst/>
-          </a:prstGeom>
-          <a:noFill/>
-          <a:ln w="12700">
-            <a:solidFill>
-              <a:prstClr val="black"/>
-            </a:solidFill>
-          </a:ln>
-        </p:spPr>
-        <p:txBody>
-          <a:bodyPr vert="horz" lIns="91440" tIns="45720" rIns="91440" bIns="45720" rtlCol="0" anchor="ctr"/>
-          <a:lstStyle/>
-          <a:p>
-            <a:endParaRPr lang="en-US"/>
-          </a:p>
-        </p:txBody>
-      </p:sp>
-      <p:sp>
-        <p:nvSpPr>
-          <p:cNvPr id="5" name="Notes Placeholder 4"/>
-          <p:cNvSpPr>
-            <a:spLocks noGrp="1"/>
-          </p:cNvSpPr>
-          <p:nvPr>
-            <p:ph type="body" sz="quarter" idx="3"/>
-          </p:nvPr>
-        </p:nvSpPr>
-        <p:spPr>
-          <a:xfrm>
-            <a:off x="685800" y="4400550"/>
-            <a:ext cx="5486400" cy="3600450"/>
-          </a:xfrm>
-          <a:prstGeom prst="rect">
-            <a:avLst/>
-          </a:prstGeom>
-        </p:spPr>
-        <p:txBody>
-          <a:bodyPr vert="horz" lIns="91440" tIns="45720" rIns="91440" bIns="45720" rtlCol="0"/>
-          <a:lstStyle/>
-          <a:p>
-            <a:pPr lvl="0"/>
-            <a:r>
-              <a:rPr lang="en-US"/>
-              <a:t>Click to edit Master text styles</a:t>
-            </a:r>
-          </a:p>
-          <a:p>
-            <a:pPr lvl="1"/>
-            <a:r>
-              <a:rPr lang="en-US"/>
-              <a:t>Second level</a:t>
-            </a:r>
-          </a:p>
-          <a:p>
-            <a:pPr lvl="2"/>
-            <a:r>
-              <a:rPr lang="en-US"/>
-              <a:t>Third level</a:t>
-            </a:r>
-          </a:p>
-          <a:p>
-            <a:pPr lvl="3"/>
-            <a:r>
-              <a:rPr lang="en-US"/>
-              <a:t>Fourth level</a:t>
-            </a:r>
-          </a:p>
-          <a:p>
-            <a:pPr lvl="4"/>
-            <a:r>
-              <a:rPr lang="en-US"/>
-              <a:t>Fifth level</a:t>
-            </a:r>
-          </a:p>
-        </p:txBody>
-      </p:sp>
-      <p:sp>
-        <p:nvSpPr>
-          <p:cNvPr id="6" name="Footer Placeholder 5"/>
-          <p:cNvSpPr>
-            <a:spLocks noGrp="1"/>
-          </p:cNvSpPr>
-          <p:nvPr>
-            <p:ph type="ftr" sz="quarter" idx="4"/>
-          </p:nvPr>
-        </p:nvSpPr>
-        <p:spPr>
-          <a:xfrm>
-            <a:off x="0" y="8685213"/>
-            <a:ext cx="2971800" cy="458787"/>
-          </a:xfrm>
-          <a:prstGeom prst="rect">
-            <a:avLst/>
-          </a:prstGeom>
-        </p:spPr>
-        <p:txBody>
-          <a:bodyPr vert="horz" lIns="91440" tIns="45720" rIns="91440" bIns="45720" rtlCol="0" anchor="b"/>
-          <a:lstStyle>
-            <a:lvl1pPr algn="l">
-              <a:defRPr sz="1200"/>
-            </a:lvl1pPr>
-          </a:lstStyle>
-          <a:p>
-            <a:endParaRPr lang="en-US"/>
-          </a:p>
-        </p:txBody>
-      </p:sp>
-      <p:sp>
-        <p:nvSpPr>
-          <p:cNvPr id="7" name="Slide Number Placeholder 6"/>
-          <p:cNvSpPr>
-            <a:spLocks noGrp="1"/>
-          </p:cNvSpPr>
-          <p:nvPr>
-            <p:ph type="sldNum" sz="quarter" idx="5"/>
-          </p:nvPr>
-        </p:nvSpPr>
-        <p:spPr>
-          <a:xfrm>
-            <a:off x="3884613" y="8685213"/>
-            <a:ext cx="2971800" cy="458787"/>
-          </a:xfrm>
-          <a:prstGeom prst="rect">
-            <a:avLst/>
-          </a:prstGeom>
-        </p:spPr>
-        <p:txBody>
-          <a:bodyPr vert="horz" lIns="91440" tIns="45720" rIns="91440" bIns="45720" rtlCol="0" anchor="b"/>
-          <a:lstStyle>
-            <a:lvl1pPr algn="r">
-              <a:defRPr sz="1200"/>
-            </a:lvl1pPr>
-          </a:lstStyle>
-          <a:p>
-            <a:fld id="{CE5E9CC1-C706-0F49-92D6-E571CC5EEA8F}" type="slidenum">
-              <a:rPr lang="en-US"/>
-              <a:t>‹#›</a:t>
-            </a:fld>
-            <a:endParaRPr lang="en-US"/>
-          </a:p>
-        </p:txBody>
-      </p:sp>
     </p:spTree>
     <p:extLst>
       <p:ext uri="{BB962C8B-B14F-4D97-AF65-F5344CB8AC3E}">
-        <p14:creationId xmlns:p14="http://schemas.microsoft.com/office/powerpoint/2010/main" val="1024086991"/>
+        <p14:creationId xmlns:p14="http://schemas.microsoft.com/office/powerpoint/2010/main" val="609280655"/>
       </p:ext>
     </p:extLst>
   </p:cSld>
@@ -509,10 +290,6 @@
           <a:bodyPr/>
           <a:lstStyle/>
           <a:p>
-            <a:r>
-              <a:rPr lang="en-US" dirty="0"/>
-              <a:t/>
-            </a:r>
             <a:endParaRPr lang="en-US" dirty="0"/>
           </a:p>
         </p:txBody>
@@ -597,10 +374,6 @@
           <a:bodyPr/>
           <a:lstStyle/>
           <a:p>
-            <a:r>
-              <a:rPr lang="en-US" dirty="0"/>
-              <a:t/>
-            </a:r>
             <a:endParaRPr lang="en-US" dirty="0"/>
           </a:p>
         </p:txBody>
@@ -685,10 +458,6 @@
           <a:bodyPr/>
           <a:lstStyle/>
           <a:p>
-            <a:r>
-              <a:rPr lang="en-US" dirty="0"/>
-              <a:t/>
-            </a:r>
             <a:endParaRPr lang="en-US" dirty="0"/>
           </a:p>
         </p:txBody>
@@ -773,10 +542,6 @@
           <a:bodyPr/>
           <a:lstStyle/>
           <a:p>
-            <a:r>
-              <a:rPr lang="en-US" dirty="0"/>
-              <a:t/>
-            </a:r>
             <a:endParaRPr lang="en-US" dirty="0"/>
           </a:p>
         </p:txBody>
@@ -861,10 +626,6 @@
           <a:bodyPr/>
           <a:lstStyle/>
           <a:p>
-            <a:r>
-              <a:rPr lang="en-US" dirty="0"/>
-              <a:t/>
-            </a:r>
             <a:endParaRPr lang="en-US" dirty="0"/>
           </a:p>
         </p:txBody>
@@ -949,10 +710,6 @@
           <a:bodyPr/>
           <a:lstStyle/>
           <a:p>
-            <a:r>
-              <a:rPr lang="en-US" dirty="0"/>
-              <a:t/>
-            </a:r>
             <a:endParaRPr lang="en-US" dirty="0"/>
           </a:p>
         </p:txBody>
@@ -1037,10 +794,6 @@
           <a:bodyPr/>
           <a:lstStyle/>
           <a:p>
-            <a:r>
-              <a:rPr lang="en-US" dirty="0"/>
-              <a:t/>
-            </a:r>
             <a:endParaRPr lang="en-US" dirty="0"/>
           </a:p>
         </p:txBody>
@@ -1125,10 +878,6 @@
           <a:bodyPr/>
           <a:lstStyle/>
           <a:p>
-            <a:r>
-              <a:rPr lang="en-US" dirty="0"/>
-              <a:t/>
-            </a:r>
             <a:endParaRPr lang="en-US" dirty="0"/>
           </a:p>
         </p:txBody>
@@ -1213,10 +962,6 @@
           <a:bodyPr/>
           <a:lstStyle/>
           <a:p>
-            <a:r>
-              <a:rPr lang="en-US" dirty="0"/>
-              <a:t/>
-            </a:r>
             <a:endParaRPr lang="en-US" dirty="0"/>
           </a:p>
         </p:txBody>
@@ -1301,10 +1046,6 @@
           <a:bodyPr/>
           <a:lstStyle/>
           <a:p>
-            <a:r>
-              <a:rPr lang="en-US" dirty="0"/>
-              <a:t/>
-            </a:r>
             <a:endParaRPr lang="en-US" dirty="0"/>
           </a:p>
         </p:txBody>
@@ -1378,6 +1119,11 @@
 <file path=ppt/slideMasters/slideMaster1.xml><?xml version="1.0" encoding="utf-8"?>
 <p:sldMaster xmlns:a="http://schemas.openxmlformats.org/drawingml/2006/main" xmlns:r="http://schemas.openxmlformats.org/officeDocument/2006/relationships" xmlns:p="http://schemas.openxmlformats.org/presentationml/2006/main">
   <p:cSld>
+    <p:bg>
+      <p:bgRef idx="1001">
+        <a:schemeClr val="bg1"/>
+      </p:bgRef>
+    </p:bg>
     <p:spTree>
       <p:nvGrpSpPr>
         <p:cNvPr id="1" name=""/>
@@ -1660,6 +1406,7 @@
         <a:solidFill>
           <a:srgbClr val="0C447C"/>
         </a:solidFill>
+        <a:effectLst/>
       </p:bgPr>
     </p:bg>
     <p:spTree>
@@ -1725,7 +1472,7 @@
             <a:prstDash val="solid"/>
           </a:ln>
           <a:effectLst>
-            <a:outerShdw sx="100000" sy="100000" kx="0" ky="0" algn="bl" rotWithShape="0" blurRad="101600" dist="38100" dir="8100000">
+            <a:outerShdw blurRad="101600" dist="38100" dir="8100000" algn="bl" rotWithShape="0">
               <a:srgbClr val="000000">
                 <a:alpha val="12000"/>
               </a:srgbClr>
@@ -1854,7 +1601,7 @@
           <a:bodyPr wrap="square" lIns="0" tIns="0" rIns="0" bIns="0" rtlCol="0" anchor="ctr"/>
           <a:lstStyle/>
           <a:p>
-            <a:pPr indent="0" marL="0">
+            <a:pPr marL="0" indent="0">
               <a:buNone/>
             </a:pPr>
             <a:r>
@@ -1918,11 +1665,11 @@
           <a:bodyPr wrap="square" lIns="0" tIns="0" rIns="0" bIns="0" rtlCol="0" anchor="ctr"/>
           <a:lstStyle/>
           <a:p>
-            <a:pPr indent="0" marL="0">
-              <a:buNone/>
-            </a:pPr>
-            <a:r>
-              <a:rPr lang="en-US" sz="1300" spc="400" kern="0" dirty="0">
+            <a:pPr marL="0" indent="0">
+              <a:buNone/>
+            </a:pPr>
+            <a:r>
+              <a:rPr lang="en-US" sz="1300" kern="0" spc="400" dirty="0">
                 <a:solidFill>
                   <a:srgbClr val="B5D4F4"/>
                 </a:solidFill>
@@ -1957,7 +1704,7 @@
           <a:bodyPr wrap="square" lIns="0" tIns="0" rIns="0" bIns="0" rtlCol="0" anchor="ctr"/>
           <a:lstStyle/>
           <a:p>
-            <a:pPr indent="0" marL="0">
+            <a:pPr marL="0" indent="0">
               <a:buNone/>
             </a:pPr>
             <a:r>
@@ -1996,7 +1743,7 @@
           <a:bodyPr wrap="square" lIns="0" tIns="0" rIns="0" bIns="0" rtlCol="0" anchor="ctr"/>
           <a:lstStyle/>
           <a:p>
-            <a:pPr indent="0" marL="0">
+            <a:pPr marL="0" indent="0">
               <a:buNone/>
             </a:pPr>
             <a:r>
@@ -2030,6 +1777,7 @@
         <a:solidFill>
           <a:srgbClr val="0C447C"/>
         </a:solidFill>
+        <a:effectLst/>
       </p:bgPr>
     </p:bg>
     <p:spTree>
@@ -2120,7 +1868,7 @@
             <a:prstDash val="solid"/>
           </a:ln>
           <a:effectLst>
-            <a:outerShdw sx="100000" sy="100000" kx="0" ky="0" algn="bl" rotWithShape="0" blurRad="101600" dist="38100" dir="8100000">
+            <a:outerShdw blurRad="101600" dist="38100" dir="8100000" algn="bl" rotWithShape="0">
               <a:srgbClr val="000000">
                 <a:alpha val="12000"/>
               </a:srgbClr>
@@ -2224,7 +1972,7 @@
           <a:bodyPr wrap="square" lIns="0" tIns="0" rIns="0" bIns="0" rtlCol="0" anchor="ctr"/>
           <a:lstStyle/>
           <a:p>
-            <a:pPr algn="ctr" indent="0" marL="0">
+            <a:pPr marL="0" indent="0" algn="ctr">
               <a:buNone/>
             </a:pPr>
             <a:r>
@@ -2288,7 +2036,7 @@
           <a:bodyPr wrap="square" lIns="0" tIns="0" rIns="0" bIns="0" rtlCol="0" anchor="ctr"/>
           <a:lstStyle/>
           <a:p>
-            <a:pPr algn="ctr" indent="0" marL="0">
+            <a:pPr marL="0" indent="0" algn="ctr">
               <a:buNone/>
             </a:pPr>
             <a:r>
@@ -2327,7 +2075,7 @@
           <a:bodyPr wrap="square" lIns="0" tIns="0" rIns="0" bIns="0" rtlCol="0" anchor="ctr"/>
           <a:lstStyle/>
           <a:p>
-            <a:pPr algn="ctr" indent="0" marL="0">
+            <a:pPr marL="0" indent="0" algn="ctr">
               <a:buNone/>
             </a:pPr>
             <a:r>
@@ -2366,7 +2114,7 @@
           <a:bodyPr wrap="square" lIns="0" tIns="0" rIns="0" bIns="0" rtlCol="0" anchor="ctr"/>
           <a:lstStyle/>
           <a:p>
-            <a:pPr algn="ctr" indent="0" marL="0">
+            <a:pPr marL="0" indent="0" algn="ctr">
               <a:buNone/>
             </a:pPr>
             <a:r>
@@ -2400,6 +2148,7 @@
         <a:solidFill>
           <a:srgbClr val="F1EFE8"/>
         </a:solidFill>
+        <a:effectLst/>
       </p:bgPr>
     </p:bg>
     <p:spTree>
@@ -2462,7 +2211,7 @@
           <a:bodyPr wrap="square" lIns="0" tIns="0" rIns="0" bIns="0" rtlCol="0" anchor="ctr"/>
           <a:lstStyle/>
           <a:p>
-            <a:pPr indent="0" marL="0">
+            <a:pPr marL="0" indent="0">
               <a:buNone/>
             </a:pPr>
             <a:r>
@@ -2504,7 +2253,7 @@
             <a:prstDash val="solid"/>
           </a:ln>
           <a:effectLst>
-            <a:outerShdw sx="100000" sy="100000" kx="0" ky="0" algn="bl" rotWithShape="0" blurRad="101600" dist="38100" dir="8100000">
+            <a:outerShdw blurRad="101600" dist="38100" dir="8100000" algn="bl" rotWithShape="0">
               <a:srgbClr val="000000">
                 <a:alpha val="12000"/>
               </a:srgbClr>
@@ -2558,7 +2307,7 @@
           <a:bodyPr wrap="square" lIns="0" tIns="0" rIns="0" bIns="0" rtlCol="0" anchor="ctr"/>
           <a:lstStyle/>
           <a:p>
-            <a:pPr algn="ctr" indent="0" marL="0">
+            <a:pPr marL="0" indent="0" algn="ctr">
               <a:buNone/>
             </a:pPr>
             <a:r>
@@ -2597,7 +2346,7 @@
           <a:bodyPr wrap="square" lIns="0" tIns="0" rIns="0" bIns="0" rtlCol="0" anchor="ctr"/>
           <a:lstStyle/>
           <a:p>
-            <a:pPr indent="0" marL="0">
+            <a:pPr marL="0" indent="0">
               <a:buNone/>
             </a:pPr>
             <a:r>
@@ -2639,7 +2388,7 @@
             <a:prstDash val="solid"/>
           </a:ln>
           <a:effectLst>
-            <a:outerShdw sx="100000" sy="100000" kx="0" ky="0" algn="bl" rotWithShape="0" blurRad="101600" dist="38100" dir="8100000">
+            <a:outerShdw blurRad="101600" dist="38100" dir="8100000" algn="bl" rotWithShape="0">
               <a:srgbClr val="000000">
                 <a:alpha val="12000"/>
               </a:srgbClr>
@@ -2693,7 +2442,7 @@
           <a:bodyPr wrap="square" lIns="0" tIns="0" rIns="0" bIns="0" rtlCol="0" anchor="ctr"/>
           <a:lstStyle/>
           <a:p>
-            <a:pPr algn="ctr" indent="0" marL="0">
+            <a:pPr marL="0" indent="0" algn="ctr">
               <a:buNone/>
             </a:pPr>
             <a:r>
@@ -2732,7 +2481,7 @@
           <a:bodyPr wrap="square" lIns="0" tIns="0" rIns="0" bIns="0" rtlCol="0" anchor="ctr"/>
           <a:lstStyle/>
           <a:p>
-            <a:pPr indent="0" marL="0">
+            <a:pPr marL="0" indent="0">
               <a:buNone/>
             </a:pPr>
             <a:r>
@@ -2774,7 +2523,7 @@
             <a:prstDash val="solid"/>
           </a:ln>
           <a:effectLst>
-            <a:outerShdw sx="100000" sy="100000" kx="0" ky="0" algn="bl" rotWithShape="0" blurRad="101600" dist="38100" dir="8100000">
+            <a:outerShdw blurRad="101600" dist="38100" dir="8100000" algn="bl" rotWithShape="0">
               <a:srgbClr val="000000">
                 <a:alpha val="12000"/>
               </a:srgbClr>
@@ -2828,7 +2577,7 @@
           <a:bodyPr wrap="square" lIns="0" tIns="0" rIns="0" bIns="0" rtlCol="0" anchor="ctr"/>
           <a:lstStyle/>
           <a:p>
-            <a:pPr algn="ctr" indent="0" marL="0">
+            <a:pPr marL="0" indent="0" algn="ctr">
               <a:buNone/>
             </a:pPr>
             <a:r>
@@ -2867,7 +2616,7 @@
           <a:bodyPr wrap="square" lIns="0" tIns="0" rIns="0" bIns="0" rtlCol="0" anchor="ctr"/>
           <a:lstStyle/>
           <a:p>
-            <a:pPr indent="0" marL="0">
+            <a:pPr marL="0" indent="0">
               <a:buNone/>
             </a:pPr>
             <a:r>
@@ -2901,6 +2650,7 @@
         <a:solidFill>
           <a:srgbClr val="0C447C"/>
         </a:solidFill>
+        <a:effectLst/>
       </p:bgPr>
     </p:bg>
     <p:spTree>
@@ -2938,7 +2688,7 @@
           <a:bodyPr wrap="square" lIns="0" tIns="0" rIns="0" bIns="0" rtlCol="0" anchor="ctr"/>
           <a:lstStyle/>
           <a:p>
-            <a:pPr indent="0" marL="0">
+            <a:pPr marL="0" indent="0">
               <a:buNone/>
             </a:pPr>
             <a:r>
@@ -3002,7 +2752,7 @@
           <a:bodyPr wrap="square" lIns="0" tIns="0" rIns="0" bIns="0" rtlCol="0" anchor="ctr"/>
           <a:lstStyle/>
           <a:p>
-            <a:pPr indent="0" marL="0">
+            <a:pPr marL="0" indent="0">
               <a:buNone/>
             </a:pPr>
             <a:r>
@@ -3044,7 +2794,7 @@
             <a:prstDash val="solid"/>
           </a:ln>
           <a:effectLst>
-            <a:outerShdw sx="100000" sy="100000" kx="0" ky="0" algn="bl" rotWithShape="0" blurRad="101600" dist="38100" dir="8100000">
+            <a:outerShdw blurRad="101600" dist="38100" dir="8100000" algn="bl" rotWithShape="0">
               <a:srgbClr val="000000">
                 <a:alpha val="12000"/>
               </a:srgbClr>
@@ -3073,7 +2823,7 @@
           <a:bodyPr wrap="square" lIns="0" tIns="0" rIns="0" bIns="0" rtlCol="0" anchor="ctr"/>
           <a:lstStyle/>
           <a:p>
-            <a:pPr algn="ctr" indent="0" marL="0">
+            <a:pPr marL="0" indent="0" algn="ctr">
               <a:buNone/>
             </a:pPr>
             <a:r>
@@ -3112,7 +2862,7 @@
           <a:bodyPr wrap="square" lIns="0" tIns="0" rIns="0" bIns="0" rtlCol="0" anchor="ctr"/>
           <a:lstStyle/>
           <a:p>
-            <a:pPr algn="ctr" indent="0" marL="0">
+            <a:pPr marL="0" indent="0" algn="ctr">
               <a:buNone/>
             </a:pPr>
             <a:r>
@@ -3129,7 +2879,7 @@
             <a:endParaRPr lang="en-US" sz="1200" dirty="0"/>
           </a:p>
           <a:p>
-            <a:pPr algn="ctr" indent="0" marL="0">
+            <a:pPr marL="0" indent="0" algn="ctr">
               <a:buNone/>
             </a:pPr>
             <a:r>
@@ -3171,7 +2921,7 @@
             <a:prstDash val="solid"/>
           </a:ln>
           <a:effectLst>
-            <a:outerShdw sx="100000" sy="100000" kx="0" ky="0" algn="bl" rotWithShape="0" blurRad="101600" dist="38100" dir="8100000">
+            <a:outerShdw blurRad="101600" dist="38100" dir="8100000" algn="bl" rotWithShape="0">
               <a:srgbClr val="000000">
                 <a:alpha val="12000"/>
               </a:srgbClr>
@@ -3200,7 +2950,7 @@
           <a:bodyPr wrap="square" lIns="0" tIns="0" rIns="0" bIns="0" rtlCol="0" anchor="ctr"/>
           <a:lstStyle/>
           <a:p>
-            <a:pPr algn="ctr" indent="0" marL="0">
+            <a:pPr marL="0" indent="0" algn="ctr">
               <a:buNone/>
             </a:pPr>
             <a:r>
@@ -3239,7 +2989,7 @@
           <a:bodyPr wrap="square" lIns="0" tIns="0" rIns="0" bIns="0" rtlCol="0" anchor="ctr"/>
           <a:lstStyle/>
           <a:p>
-            <a:pPr algn="ctr" indent="0" marL="0">
+            <a:pPr marL="0" indent="0" algn="ctr">
               <a:buNone/>
             </a:pPr>
             <a:r>
@@ -3281,7 +3031,7 @@
             <a:prstDash val="solid"/>
           </a:ln>
           <a:effectLst>
-            <a:outerShdw sx="100000" sy="100000" kx="0" ky="0" algn="bl" rotWithShape="0" blurRad="101600" dist="38100" dir="8100000">
+            <a:outerShdw blurRad="101600" dist="38100" dir="8100000" algn="bl" rotWithShape="0">
               <a:srgbClr val="000000">
                 <a:alpha val="12000"/>
               </a:srgbClr>
@@ -3310,7 +3060,7 @@
           <a:bodyPr wrap="square" lIns="0" tIns="0" rIns="0" bIns="0" rtlCol="0" anchor="ctr"/>
           <a:lstStyle/>
           <a:p>
-            <a:pPr algn="ctr" indent="0" marL="0">
+            <a:pPr marL="0" indent="0" algn="ctr">
               <a:buNone/>
             </a:pPr>
             <a:r>
@@ -3349,7 +3099,7 @@
           <a:bodyPr wrap="square" lIns="0" tIns="0" rIns="0" bIns="0" rtlCol="0" anchor="ctr"/>
           <a:lstStyle/>
           <a:p>
-            <a:pPr algn="ctr" indent="0" marL="0">
+            <a:pPr marL="0" indent="0" algn="ctr">
               <a:buNone/>
             </a:pPr>
             <a:r>
@@ -3366,7 +3116,7 @@
             <a:endParaRPr lang="en-US" sz="1200" dirty="0"/>
           </a:p>
           <a:p>
-            <a:pPr algn="ctr" indent="0" marL="0">
+            <a:pPr marL="0" indent="0" algn="ctr">
               <a:buNone/>
             </a:pPr>
             <a:r>
@@ -3408,7 +3158,7 @@
             <a:prstDash val="solid"/>
           </a:ln>
           <a:effectLst>
-            <a:outerShdw sx="100000" sy="100000" kx="0" ky="0" algn="bl" rotWithShape="0" blurRad="101600" dist="38100" dir="8100000">
+            <a:outerShdw blurRad="101600" dist="38100" dir="8100000" algn="bl" rotWithShape="0">
               <a:srgbClr val="000000">
                 <a:alpha val="12000"/>
               </a:srgbClr>
@@ -3437,7 +3187,7 @@
           <a:bodyPr wrap="square" lIns="0" tIns="0" rIns="0" bIns="0" rtlCol="0" anchor="ctr"/>
           <a:lstStyle/>
           <a:p>
-            <a:pPr algn="ctr" indent="0" marL="0">
+            <a:pPr marL="0" indent="0" algn="ctr">
               <a:buNone/>
             </a:pPr>
             <a:r>
@@ -3476,7 +3226,7 @@
           <a:bodyPr wrap="square" lIns="0" tIns="0" rIns="0" bIns="0" rtlCol="0" anchor="ctr"/>
           <a:lstStyle/>
           <a:p>
-            <a:pPr algn="ctr" indent="0" marL="0">
+            <a:pPr marL="0" indent="0" algn="ctr">
               <a:buNone/>
             </a:pPr>
             <a:r>
@@ -3510,6 +3260,7 @@
         <a:solidFill>
           <a:srgbClr val="F1EFE8"/>
         </a:solidFill>
+        <a:effectLst/>
       </p:bgPr>
     </p:bg>
     <p:spTree>
@@ -3572,7 +3323,7 @@
           <a:bodyPr wrap="square" lIns="0" tIns="0" rIns="0" bIns="0" rtlCol="0" anchor="ctr"/>
           <a:lstStyle/>
           <a:p>
-            <a:pPr indent="0" marL="0">
+            <a:pPr marL="0" indent="0">
               <a:buNone/>
             </a:pPr>
             <a:r>
@@ -3614,7 +3365,7 @@
             <a:prstDash val="solid"/>
           </a:ln>
           <a:effectLst>
-            <a:outerShdw sx="100000" sy="100000" kx="0" ky="0" algn="bl" rotWithShape="0" blurRad="101600" dist="38100" dir="8100000">
+            <a:outerShdw blurRad="101600" dist="38100" dir="8100000" algn="bl" rotWithShape="0">
               <a:srgbClr val="000000">
                 <a:alpha val="12000"/>
               </a:srgbClr>
@@ -3643,7 +3394,7 @@
           <a:bodyPr wrap="square" lIns="0" tIns="0" rIns="0" bIns="0" rtlCol="0" anchor="ctr"/>
           <a:lstStyle/>
           <a:p>
-            <a:pPr algn="ctr" indent="0" marL="0">
+            <a:pPr marL="0" indent="0" algn="ctr">
               <a:buNone/>
             </a:pPr>
             <a:r>
@@ -3682,7 +3433,7 @@
           <a:bodyPr wrap="square" lIns="0" tIns="0" rIns="0" bIns="0" rtlCol="0" anchor="ctr"/>
           <a:lstStyle/>
           <a:p>
-            <a:pPr algn="ctr" indent="0" marL="0">
+            <a:pPr marL="0" indent="0" algn="ctr">
               <a:buNone/>
             </a:pPr>
             <a:r>
@@ -3699,7 +3450,7 @@
             <a:endParaRPr lang="en-US" sz="1100" dirty="0"/>
           </a:p>
           <a:p>
-            <a:pPr algn="ctr" indent="0" marL="0">
+            <a:pPr marL="0" indent="0" algn="ctr">
               <a:buNone/>
             </a:pPr>
             <a:r>
@@ -3741,7 +3492,7 @@
             <a:prstDash val="solid"/>
           </a:ln>
           <a:effectLst>
-            <a:outerShdw sx="100000" sy="100000" kx="0" ky="0" algn="bl" rotWithShape="0" blurRad="101600" dist="38100" dir="8100000">
+            <a:outerShdw blurRad="101600" dist="38100" dir="8100000" algn="bl" rotWithShape="0">
               <a:srgbClr val="000000">
                 <a:alpha val="12000"/>
               </a:srgbClr>
@@ -3770,7 +3521,7 @@
           <a:bodyPr wrap="square" lIns="0" tIns="0" rIns="0" bIns="0" rtlCol="0" anchor="ctr"/>
           <a:lstStyle/>
           <a:p>
-            <a:pPr algn="ctr" indent="0" marL="0">
+            <a:pPr marL="0" indent="0" algn="ctr">
               <a:buNone/>
             </a:pPr>
             <a:r>
@@ -3809,7 +3560,7 @@
           <a:bodyPr wrap="square" lIns="0" tIns="0" rIns="0" bIns="0" rtlCol="0" anchor="ctr"/>
           <a:lstStyle/>
           <a:p>
-            <a:pPr algn="ctr" indent="0" marL="0">
+            <a:pPr marL="0" indent="0" algn="ctr">
               <a:buNone/>
             </a:pPr>
             <a:r>
@@ -3826,7 +3577,7 @@
             <a:endParaRPr lang="en-US" sz="1100" dirty="0"/>
           </a:p>
           <a:p>
-            <a:pPr algn="ctr" indent="0" marL="0">
+            <a:pPr marL="0" indent="0" algn="ctr">
               <a:buNone/>
             </a:pPr>
             <a:r>
@@ -3868,7 +3619,7 @@
             <a:prstDash val="solid"/>
           </a:ln>
           <a:effectLst>
-            <a:outerShdw sx="100000" sy="100000" kx="0" ky="0" algn="bl" rotWithShape="0" blurRad="101600" dist="38100" dir="8100000">
+            <a:outerShdw blurRad="101600" dist="38100" dir="8100000" algn="bl" rotWithShape="0">
               <a:srgbClr val="000000">
                 <a:alpha val="12000"/>
               </a:srgbClr>
@@ -3897,7 +3648,7 @@
           <a:bodyPr wrap="square" lIns="0" tIns="0" rIns="0" bIns="0" rtlCol="0" anchor="ctr"/>
           <a:lstStyle/>
           <a:p>
-            <a:pPr algn="ctr" indent="0" marL="0">
+            <a:pPr marL="0" indent="0" algn="ctr">
               <a:buNone/>
             </a:pPr>
             <a:r>
@@ -3936,7 +3687,7 @@
           <a:bodyPr wrap="square" lIns="0" tIns="0" rIns="0" bIns="0" rtlCol="0" anchor="ctr"/>
           <a:lstStyle/>
           <a:p>
-            <a:pPr algn="ctr" indent="0" marL="0">
+            <a:pPr marL="0" indent="0" algn="ctr">
               <a:buNone/>
             </a:pPr>
             <a:r>
@@ -3953,7 +3704,7 @@
             <a:endParaRPr lang="en-US" sz="1100" dirty="0"/>
           </a:p>
           <a:p>
-            <a:pPr algn="ctr" indent="0" marL="0">
+            <a:pPr marL="0" indent="0" algn="ctr">
               <a:buNone/>
             </a:pPr>
             <a:r>
@@ -3995,7 +3746,7 @@
             <a:prstDash val="solid"/>
           </a:ln>
           <a:effectLst>
-            <a:outerShdw sx="100000" sy="100000" kx="0" ky="0" algn="bl" rotWithShape="0" blurRad="101600" dist="38100" dir="8100000">
+            <a:outerShdw blurRad="101600" dist="38100" dir="8100000" algn="bl" rotWithShape="0">
               <a:srgbClr val="000000">
                 <a:alpha val="12000"/>
               </a:srgbClr>
@@ -4024,7 +3775,7 @@
           <a:bodyPr wrap="square" lIns="0" tIns="0" rIns="0" bIns="0" rtlCol="0" anchor="ctr"/>
           <a:lstStyle/>
           <a:p>
-            <a:pPr algn="ctr" indent="0" marL="0">
+            <a:pPr marL="0" indent="0" algn="ctr">
               <a:buNone/>
             </a:pPr>
             <a:r>
@@ -4063,7 +3814,7 @@
           <a:bodyPr wrap="square" lIns="0" tIns="0" rIns="0" bIns="0" rtlCol="0" anchor="ctr"/>
           <a:lstStyle/>
           <a:p>
-            <a:pPr algn="ctr" indent="0" marL="0">
+            <a:pPr marL="0" indent="0" algn="ctr">
               <a:buNone/>
             </a:pPr>
             <a:r>
@@ -4080,7 +3831,7 @@
             <a:endParaRPr lang="en-US" sz="1100" dirty="0"/>
           </a:p>
           <a:p>
-            <a:pPr algn="ctr" indent="0" marL="0">
+            <a:pPr marL="0" indent="0" algn="ctr">
               <a:buNone/>
             </a:pPr>
             <a:r>
@@ -4119,7 +3870,7 @@
           <a:bodyPr wrap="square" lIns="0" tIns="0" rIns="0" bIns="0" rtlCol="0" anchor="ctr"/>
           <a:lstStyle/>
           <a:p>
-            <a:pPr indent="0" marL="0">
+            <a:pPr marL="0" indent="0">
               <a:buNone/>
             </a:pPr>
             <a:r>
@@ -4158,7 +3909,7 @@
           <a:bodyPr wrap="square" lIns="0" tIns="0" rIns="0" bIns="0" rtlCol="0" anchor="ctr"/>
           <a:lstStyle/>
           <a:p>
-            <a:pPr indent="0" marL="0">
+            <a:pPr marL="0" indent="0">
               <a:buNone/>
             </a:pPr>
             <a:r>
@@ -4197,7 +3948,7 @@
           <a:bodyPr wrap="square" lIns="0" tIns="0" rIns="0" bIns="0" rtlCol="0" anchor="ctr"/>
           <a:lstStyle/>
           <a:p>
-            <a:pPr indent="0" marL="0">
+            <a:pPr marL="0" indent="0">
               <a:buNone/>
             </a:pPr>
             <a:r>
@@ -4236,7 +3987,7 @@
           <a:bodyPr wrap="square" lIns="0" tIns="0" rIns="0" bIns="0" rtlCol="0" anchor="ctr"/>
           <a:lstStyle/>
           <a:p>
-            <a:pPr indent="0" marL="0">
+            <a:pPr marL="0" indent="0">
               <a:buNone/>
             </a:pPr>
             <a:r>
@@ -4275,7 +4026,7 @@
           <a:bodyPr wrap="square" lIns="0" tIns="0" rIns="0" bIns="0" rtlCol="0" anchor="ctr"/>
           <a:lstStyle/>
           <a:p>
-            <a:pPr indent="0" marL="0">
+            <a:pPr marL="0" indent="0">
               <a:buNone/>
             </a:pPr>
             <a:r>
@@ -4309,6 +4060,7 @@
         <a:solidFill>
           <a:srgbClr val="0C447C"/>
         </a:solidFill>
+        <a:effectLst/>
       </p:bgPr>
     </p:bg>
     <p:spTree>
@@ -4346,7 +4098,7 @@
           <a:bodyPr wrap="square" lIns="0" tIns="0" rIns="0" bIns="0" rtlCol="0" anchor="ctr"/>
           <a:lstStyle/>
           <a:p>
-            <a:pPr indent="0" marL="0">
+            <a:pPr marL="0" indent="0">
               <a:buNone/>
             </a:pPr>
             <a:r>
@@ -4413,7 +4165,7 @@
             <a:prstDash val="solid"/>
           </a:ln>
           <a:effectLst>
-            <a:outerShdw sx="100000" sy="100000" kx="0" ky="0" algn="bl" rotWithShape="0" blurRad="101600" dist="38100" dir="8100000">
+            <a:outerShdw blurRad="101600" dist="38100" dir="8100000" algn="bl" rotWithShape="0">
               <a:srgbClr val="000000">
                 <a:alpha val="12000"/>
               </a:srgbClr>
@@ -4442,7 +4194,7 @@
           <a:bodyPr wrap="square" lIns="0" tIns="0" rIns="0" bIns="0" rtlCol="0" anchor="ctr"/>
           <a:lstStyle/>
           <a:p>
-            <a:pPr indent="0" marL="0">
+            <a:pPr marL="0" indent="0">
               <a:buNone/>
             </a:pPr>
             <a:r>
@@ -4481,7 +4233,7 @@
           <a:bodyPr wrap="square" lIns="0" tIns="0" rIns="0" bIns="0" rtlCol="0" anchor="ctr"/>
           <a:lstStyle/>
           <a:p>
-            <a:pPr indent="0" marL="0">
+            <a:pPr marL="0" indent="0">
               <a:buNone/>
             </a:pPr>
             <a:r>
@@ -4523,7 +4275,7 @@
             <a:prstDash val="solid"/>
           </a:ln>
           <a:effectLst>
-            <a:outerShdw sx="100000" sy="100000" kx="0" ky="0" algn="bl" rotWithShape="0" blurRad="101600" dist="38100" dir="8100000">
+            <a:outerShdw blurRad="101600" dist="38100" dir="8100000" algn="bl" rotWithShape="0">
               <a:srgbClr val="000000">
                 <a:alpha val="12000"/>
               </a:srgbClr>
@@ -4552,7 +4304,7 @@
           <a:bodyPr wrap="square" lIns="0" tIns="0" rIns="0" bIns="0" rtlCol="0" anchor="ctr"/>
           <a:lstStyle/>
           <a:p>
-            <a:pPr indent="0" marL="0">
+            <a:pPr marL="0" indent="0">
               <a:buNone/>
             </a:pPr>
             <a:r>
@@ -4591,7 +4343,7 @@
           <a:bodyPr wrap="square" lIns="0" tIns="0" rIns="0" bIns="0" rtlCol="0" anchor="ctr"/>
           <a:lstStyle/>
           <a:p>
-            <a:pPr indent="0" marL="0">
+            <a:pPr marL="0" indent="0">
               <a:buNone/>
             </a:pPr>
             <a:r>
@@ -4633,7 +4385,7 @@
             <a:prstDash val="solid"/>
           </a:ln>
           <a:effectLst>
-            <a:outerShdw sx="100000" sy="100000" kx="0" ky="0" algn="bl" rotWithShape="0" blurRad="101600" dist="38100" dir="8100000">
+            <a:outerShdw blurRad="101600" dist="38100" dir="8100000" algn="bl" rotWithShape="0">
               <a:srgbClr val="000000">
                 <a:alpha val="12000"/>
               </a:srgbClr>
@@ -4662,7 +4414,7 @@
           <a:bodyPr wrap="square" lIns="0" tIns="0" rIns="0" bIns="0" rtlCol="0" anchor="ctr"/>
           <a:lstStyle/>
           <a:p>
-            <a:pPr indent="0" marL="0">
+            <a:pPr marL="0" indent="0">
               <a:buNone/>
             </a:pPr>
             <a:r>
@@ -4701,7 +4453,7 @@
           <a:bodyPr wrap="square" lIns="0" tIns="0" rIns="0" bIns="0" rtlCol="0" anchor="ctr"/>
           <a:lstStyle/>
           <a:p>
-            <a:pPr indent="0" marL="0">
+            <a:pPr marL="0" indent="0">
               <a:buNone/>
             </a:pPr>
             <a:r>
@@ -4743,7 +4495,7 @@
             <a:prstDash val="solid"/>
           </a:ln>
           <a:effectLst>
-            <a:outerShdw sx="100000" sy="100000" kx="0" ky="0" algn="bl" rotWithShape="0" blurRad="101600" dist="38100" dir="8100000">
+            <a:outerShdw blurRad="101600" dist="38100" dir="8100000" algn="bl" rotWithShape="0">
               <a:srgbClr val="000000">
                 <a:alpha val="12000"/>
               </a:srgbClr>
@@ -4772,7 +4524,7 @@
           <a:bodyPr wrap="square" lIns="0" tIns="0" rIns="0" bIns="0" rtlCol="0" anchor="ctr"/>
           <a:lstStyle/>
           <a:p>
-            <a:pPr indent="0" marL="0">
+            <a:pPr marL="0" indent="0">
               <a:buNone/>
             </a:pPr>
             <a:r>
@@ -4811,7 +4563,7 @@
           <a:bodyPr wrap="square" lIns="0" tIns="0" rIns="0" bIns="0" rtlCol="0" anchor="ctr"/>
           <a:lstStyle/>
           <a:p>
-            <a:pPr indent="0" marL="0">
+            <a:pPr marL="0" indent="0">
               <a:buNone/>
             </a:pPr>
             <a:r>
@@ -4853,7 +4605,7 @@
             <a:prstDash val="solid"/>
           </a:ln>
           <a:effectLst>
-            <a:outerShdw sx="100000" sy="100000" kx="0" ky="0" algn="bl" rotWithShape="0" blurRad="101600" dist="38100" dir="8100000">
+            <a:outerShdw blurRad="101600" dist="38100" dir="8100000" algn="bl" rotWithShape="0">
               <a:srgbClr val="000000">
                 <a:alpha val="12000"/>
               </a:srgbClr>
@@ -4882,7 +4634,7 @@
           <a:bodyPr wrap="square" lIns="0" tIns="0" rIns="0" bIns="0" rtlCol="0" anchor="ctr"/>
           <a:lstStyle/>
           <a:p>
-            <a:pPr indent="0" marL="0">
+            <a:pPr marL="0" indent="0">
               <a:buNone/>
             </a:pPr>
             <a:r>
@@ -4921,7 +4673,7 @@
           <a:bodyPr wrap="square" lIns="0" tIns="0" rIns="0" bIns="0" rtlCol="0" anchor="ctr"/>
           <a:lstStyle/>
           <a:p>
-            <a:pPr indent="0" marL="0">
+            <a:pPr marL="0" indent="0">
               <a:buNone/>
             </a:pPr>
             <a:r>
@@ -4963,7 +4715,7 @@
             <a:prstDash val="solid"/>
           </a:ln>
           <a:effectLst>
-            <a:outerShdw sx="100000" sy="100000" kx="0" ky="0" algn="bl" rotWithShape="0" blurRad="101600" dist="38100" dir="8100000">
+            <a:outerShdw blurRad="101600" dist="38100" dir="8100000" algn="bl" rotWithShape="0">
               <a:srgbClr val="000000">
                 <a:alpha val="12000"/>
               </a:srgbClr>
@@ -4992,7 +4744,7 @@
           <a:bodyPr wrap="square" lIns="0" tIns="0" rIns="0" bIns="0" rtlCol="0" anchor="ctr"/>
           <a:lstStyle/>
           <a:p>
-            <a:pPr indent="0" marL="0">
+            <a:pPr marL="0" indent="0">
               <a:buNone/>
             </a:pPr>
             <a:r>
@@ -5031,7 +4783,7 @@
           <a:bodyPr wrap="square" lIns="0" tIns="0" rIns="0" bIns="0" rtlCol="0" anchor="ctr"/>
           <a:lstStyle/>
           <a:p>
-            <a:pPr indent="0" marL="0">
+            <a:pPr marL="0" indent="0">
               <a:buNone/>
             </a:pPr>
             <a:r>
@@ -5065,6 +4817,7 @@
         <a:solidFill>
           <a:srgbClr val="F1EFE8"/>
         </a:solidFill>
+        <a:effectLst/>
       </p:bgPr>
     </p:bg>
     <p:spTree>
@@ -5127,7 +4880,7 @@
           <a:bodyPr wrap="square" lIns="0" tIns="0" rIns="0" bIns="0" rtlCol="0" anchor="ctr"/>
           <a:lstStyle/>
           <a:p>
-            <a:pPr indent="0" marL="0">
+            <a:pPr marL="0" indent="0">
               <a:buNone/>
             </a:pPr>
             <a:r>
@@ -5169,7 +4922,7 @@
             <a:prstDash val="solid"/>
           </a:ln>
           <a:effectLst>
-            <a:outerShdw sx="100000" sy="100000" kx="0" ky="0" algn="bl" rotWithShape="0" blurRad="101600" dist="38100" dir="8100000">
+            <a:outerShdw blurRad="101600" dist="38100" dir="8100000" algn="bl" rotWithShape="0">
               <a:srgbClr val="000000">
                 <a:alpha val="12000"/>
               </a:srgbClr>
@@ -5198,7 +4951,7 @@
           <a:bodyPr wrap="square" lIns="0" tIns="0" rIns="0" bIns="0" rtlCol="0" anchor="ctr"/>
           <a:lstStyle/>
           <a:p>
-            <a:pPr algn="ctr" indent="0" marL="0">
+            <a:pPr marL="0" indent="0" algn="ctr">
               <a:buNone/>
             </a:pPr>
             <a:r>
@@ -5265,7 +5018,7 @@
             <a:prstDash val="solid"/>
           </a:ln>
           <a:effectLst>
-            <a:outerShdw sx="100000" sy="100000" kx="0" ky="0" algn="bl" rotWithShape="0" blurRad="101600" dist="38100" dir="8100000">
+            <a:outerShdw blurRad="101600" dist="38100" dir="8100000" algn="bl" rotWithShape="0">
               <a:srgbClr val="000000">
                 <a:alpha val="12000"/>
               </a:srgbClr>
@@ -5294,7 +5047,7 @@
           <a:bodyPr wrap="square" lIns="0" tIns="0" rIns="0" bIns="0" rtlCol="0" anchor="ctr"/>
           <a:lstStyle/>
           <a:p>
-            <a:pPr algn="ctr" indent="0" marL="0">
+            <a:pPr marL="0" indent="0" algn="ctr">
               <a:buNone/>
             </a:pPr>
             <a:r>
@@ -5333,7 +5086,7 @@
           <a:bodyPr wrap="square" lIns="0" tIns="0" rIns="0" bIns="0" rtlCol="0" anchor="ctr"/>
           <a:lstStyle/>
           <a:p>
-            <a:pPr algn="ctr" indent="0" marL="0">
+            <a:pPr marL="0" indent="0" algn="ctr">
               <a:buNone/>
             </a:pPr>
             <a:r>
@@ -5350,7 +5103,7 @@
             <a:endParaRPr lang="en-US" sz="1100" dirty="0"/>
           </a:p>
           <a:p>
-            <a:pPr algn="ctr" indent="0" marL="0">
+            <a:pPr marL="0" indent="0" algn="ctr">
               <a:buNone/>
             </a:pPr>
             <a:r>
@@ -5392,7 +5145,7 @@
             <a:prstDash val="solid"/>
           </a:ln>
           <a:effectLst>
-            <a:outerShdw sx="100000" sy="100000" kx="0" ky="0" algn="bl" rotWithShape="0" blurRad="101600" dist="38100" dir="8100000">
+            <a:outerShdw blurRad="101600" dist="38100" dir="8100000" algn="bl" rotWithShape="0">
               <a:srgbClr val="000000">
                 <a:alpha val="12000"/>
               </a:srgbClr>
@@ -5421,7 +5174,7 @@
           <a:bodyPr wrap="square" lIns="0" tIns="0" rIns="0" bIns="0" rtlCol="0" anchor="ctr"/>
           <a:lstStyle/>
           <a:p>
-            <a:pPr algn="ctr" indent="0" marL="0">
+            <a:pPr marL="0" indent="0" algn="ctr">
               <a:buNone/>
             </a:pPr>
             <a:r>
@@ -5488,7 +5241,7 @@
             <a:prstDash val="solid"/>
           </a:ln>
           <a:effectLst>
-            <a:outerShdw sx="100000" sy="100000" kx="0" ky="0" algn="bl" rotWithShape="0" blurRad="101600" dist="38100" dir="8100000">
+            <a:outerShdw blurRad="101600" dist="38100" dir="8100000" algn="bl" rotWithShape="0">
               <a:srgbClr val="000000">
                 <a:alpha val="12000"/>
               </a:srgbClr>
@@ -5517,7 +5270,7 @@
           <a:bodyPr wrap="square" lIns="0" tIns="0" rIns="0" bIns="0" rtlCol="0" anchor="ctr"/>
           <a:lstStyle/>
           <a:p>
-            <a:pPr algn="ctr" indent="0" marL="0">
+            <a:pPr marL="0" indent="0" algn="ctr">
               <a:buNone/>
             </a:pPr>
             <a:r>
@@ -5556,7 +5309,7 @@
           <a:bodyPr wrap="square" lIns="0" tIns="0" rIns="0" bIns="0" rtlCol="0" anchor="ctr"/>
           <a:lstStyle/>
           <a:p>
-            <a:pPr algn="ctr" indent="0" marL="0">
+            <a:pPr marL="0" indent="0" algn="ctr">
               <a:buNone/>
             </a:pPr>
             <a:r>
@@ -5573,7 +5326,7 @@
             <a:endParaRPr lang="en-US" sz="1100" dirty="0"/>
           </a:p>
           <a:p>
-            <a:pPr algn="ctr" indent="0" marL="0">
+            <a:pPr marL="0" indent="0" algn="ctr">
               <a:buNone/>
             </a:pPr>
             <a:r>
@@ -5615,7 +5368,7 @@
             <a:prstDash val="solid"/>
           </a:ln>
           <a:effectLst>
-            <a:outerShdw sx="100000" sy="100000" kx="0" ky="0" algn="bl" rotWithShape="0" blurRad="101600" dist="38100" dir="8100000">
+            <a:outerShdw blurRad="101600" dist="38100" dir="8100000" algn="bl" rotWithShape="0">
               <a:srgbClr val="000000">
                 <a:alpha val="12000"/>
               </a:srgbClr>
@@ -5644,7 +5397,7 @@
           <a:bodyPr wrap="square" lIns="0" tIns="0" rIns="0" bIns="0" rtlCol="0" anchor="ctr"/>
           <a:lstStyle/>
           <a:p>
-            <a:pPr algn="ctr" indent="0" marL="0">
+            <a:pPr marL="0" indent="0" algn="ctr">
               <a:buNone/>
             </a:pPr>
             <a:r>
@@ -5711,7 +5464,7 @@
             <a:prstDash val="solid"/>
           </a:ln>
           <a:effectLst>
-            <a:outerShdw sx="100000" sy="100000" kx="0" ky="0" algn="bl" rotWithShape="0" blurRad="101600" dist="38100" dir="8100000">
+            <a:outerShdw blurRad="101600" dist="38100" dir="8100000" algn="bl" rotWithShape="0">
               <a:srgbClr val="000000">
                 <a:alpha val="12000"/>
               </a:srgbClr>
@@ -5740,7 +5493,7 @@
           <a:bodyPr wrap="square" lIns="0" tIns="0" rIns="0" bIns="0" rtlCol="0" anchor="ctr"/>
           <a:lstStyle/>
           <a:p>
-            <a:pPr algn="ctr" indent="0" marL="0">
+            <a:pPr marL="0" indent="0" algn="ctr">
               <a:buNone/>
             </a:pPr>
             <a:r>
@@ -5779,7 +5532,7 @@
           <a:bodyPr wrap="square" lIns="0" tIns="0" rIns="0" bIns="0" rtlCol="0" anchor="ctr"/>
           <a:lstStyle/>
           <a:p>
-            <a:pPr algn="ctr" indent="0" marL="0">
+            <a:pPr marL="0" indent="0" algn="ctr">
               <a:buNone/>
             </a:pPr>
             <a:r>
@@ -5796,7 +5549,7 @@
             <a:endParaRPr lang="en-US" sz="1100" dirty="0"/>
           </a:p>
           <a:p>
-            <a:pPr algn="ctr" indent="0" marL="0">
+            <a:pPr marL="0" indent="0" algn="ctr">
               <a:buNone/>
             </a:pPr>
             <a:r>
@@ -5838,7 +5591,7 @@
             <a:prstDash val="solid"/>
           </a:ln>
           <a:effectLst>
-            <a:outerShdw sx="100000" sy="100000" kx="0" ky="0" algn="bl" rotWithShape="0" blurRad="101600" dist="38100" dir="8100000">
+            <a:outerShdw blurRad="101600" dist="38100" dir="8100000" algn="bl" rotWithShape="0">
               <a:srgbClr val="000000">
                 <a:alpha val="12000"/>
               </a:srgbClr>
@@ -5867,7 +5620,7 @@
           <a:bodyPr wrap="square" lIns="0" tIns="0" rIns="0" bIns="0" rtlCol="0" anchor="ctr"/>
           <a:lstStyle/>
           <a:p>
-            <a:pPr algn="ctr" indent="0" marL="0">
+            <a:pPr marL="0" indent="0" algn="ctr">
               <a:buNone/>
             </a:pPr>
             <a:r>
@@ -5934,7 +5687,7 @@
             <a:prstDash val="solid"/>
           </a:ln>
           <a:effectLst>
-            <a:outerShdw sx="100000" sy="100000" kx="0" ky="0" algn="bl" rotWithShape="0" blurRad="101600" dist="38100" dir="8100000">
+            <a:outerShdw blurRad="101600" dist="38100" dir="8100000" algn="bl" rotWithShape="0">
               <a:srgbClr val="000000">
                 <a:alpha val="12000"/>
               </a:srgbClr>
@@ -5963,7 +5716,7 @@
           <a:bodyPr wrap="square" lIns="0" tIns="0" rIns="0" bIns="0" rtlCol="0" anchor="ctr"/>
           <a:lstStyle/>
           <a:p>
-            <a:pPr algn="ctr" indent="0" marL="0">
+            <a:pPr marL="0" indent="0" algn="ctr">
               <a:buNone/>
             </a:pPr>
             <a:r>
@@ -6002,7 +5755,7 @@
           <a:bodyPr wrap="square" lIns="0" tIns="0" rIns="0" bIns="0" rtlCol="0" anchor="ctr"/>
           <a:lstStyle/>
           <a:p>
-            <a:pPr algn="ctr" indent="0" marL="0">
+            <a:pPr marL="0" indent="0" algn="ctr">
               <a:buNone/>
             </a:pPr>
             <a:r>
@@ -6019,7 +5772,7 @@
             <a:endParaRPr lang="en-US" sz="1100" dirty="0"/>
           </a:p>
           <a:p>
-            <a:pPr algn="ctr" indent="0" marL="0">
+            <a:pPr marL="0" indent="0" algn="ctr">
               <a:buNone/>
             </a:pPr>
             <a:r>
@@ -6061,7 +5814,7 @@
             <a:prstDash val="solid"/>
           </a:ln>
           <a:effectLst>
-            <a:outerShdw sx="100000" sy="100000" kx="0" ky="0" algn="bl" rotWithShape="0" blurRad="101600" dist="38100" dir="8100000">
+            <a:outerShdw blurRad="101600" dist="38100" dir="8100000" algn="bl" rotWithShape="0">
               <a:srgbClr val="000000">
                 <a:alpha val="12000"/>
               </a:srgbClr>
@@ -6090,7 +5843,7 @@
           <a:bodyPr wrap="square" lIns="0" tIns="0" rIns="0" bIns="0" rtlCol="0" anchor="ctr"/>
           <a:lstStyle/>
           <a:p>
-            <a:pPr algn="ctr" indent="0" marL="0">
+            <a:pPr marL="0" indent="0" algn="ctr">
               <a:buNone/>
             </a:pPr>
             <a:r>
@@ -6132,7 +5885,7 @@
             <a:prstDash val="solid"/>
           </a:ln>
           <a:effectLst>
-            <a:outerShdw sx="100000" sy="100000" kx="0" ky="0" algn="bl" rotWithShape="0" blurRad="101600" dist="38100" dir="8100000">
+            <a:outerShdw blurRad="101600" dist="38100" dir="8100000" algn="bl" rotWithShape="0">
               <a:srgbClr val="000000">
                 <a:alpha val="12000"/>
               </a:srgbClr>
@@ -6161,7 +5914,7 @@
           <a:bodyPr wrap="square" lIns="0" tIns="0" rIns="0" bIns="0" rtlCol="0" anchor="ctr"/>
           <a:lstStyle/>
           <a:p>
-            <a:pPr algn="ctr" indent="0" marL="0">
+            <a:pPr marL="0" indent="0" algn="ctr">
               <a:buNone/>
             </a:pPr>
             <a:r>
@@ -6200,7 +5953,7 @@
           <a:bodyPr wrap="square" lIns="0" tIns="0" rIns="0" bIns="0" rtlCol="0" anchor="ctr"/>
           <a:lstStyle/>
           <a:p>
-            <a:pPr algn="ctr" indent="0" marL="0">
+            <a:pPr marL="0" indent="0" algn="ctr">
               <a:buNone/>
             </a:pPr>
             <a:r>
@@ -6217,7 +5970,7 @@
             <a:endParaRPr lang="en-US" sz="1100" dirty="0"/>
           </a:p>
           <a:p>
-            <a:pPr algn="ctr" indent="0" marL="0">
+            <a:pPr marL="0" indent="0" algn="ctr">
               <a:buNone/>
             </a:pPr>
             <a:r>
@@ -6259,7 +6012,7 @@
             <a:prstDash val="solid"/>
           </a:ln>
           <a:effectLst>
-            <a:outerShdw sx="100000" sy="100000" kx="0" ky="0" algn="bl" rotWithShape="0" blurRad="101600" dist="38100" dir="8100000">
+            <a:outerShdw blurRad="101600" dist="38100" dir="8100000" algn="bl" rotWithShape="0">
               <a:srgbClr val="000000">
                 <a:alpha val="12000"/>
               </a:srgbClr>
@@ -6288,7 +6041,7 @@
           <a:bodyPr wrap="square" lIns="0" tIns="0" rIns="0" bIns="0" rtlCol="0" anchor="ctr"/>
           <a:lstStyle/>
           <a:p>
-            <a:pPr indent="0" marL="0">
+            <a:pPr marL="0" indent="0">
               <a:buNone/>
             </a:pPr>
             <a:r>
@@ -6327,7 +6080,7 @@
           <a:bodyPr wrap="square" lIns="0" tIns="0" rIns="0" bIns="0" rtlCol="0" anchor="ctr"/>
           <a:lstStyle/>
           <a:p>
-            <a:pPr indent="0" marL="0">
+            <a:pPr marL="0" indent="0">
               <a:buNone/>
             </a:pPr>
             <a:r>
@@ -6361,6 +6114,7 @@
         <a:solidFill>
           <a:srgbClr val="0C447C"/>
         </a:solidFill>
+        <a:effectLst/>
       </p:bgPr>
     </p:bg>
     <p:spTree>
@@ -6398,7 +6152,7 @@
           <a:bodyPr wrap="square" lIns="0" tIns="0" rIns="0" bIns="0" rtlCol="0" anchor="ctr"/>
           <a:lstStyle/>
           <a:p>
-            <a:pPr indent="0" marL="0">
+            <a:pPr marL="0" indent="0">
               <a:buNone/>
             </a:pPr>
             <a:r>
@@ -6465,7 +6219,7 @@
             <a:prstDash val="solid"/>
           </a:ln>
           <a:effectLst>
-            <a:outerShdw sx="100000" sy="100000" kx="0" ky="0" algn="bl" rotWithShape="0" blurRad="101600" dist="38100" dir="8100000">
+            <a:outerShdw blurRad="101600" dist="38100" dir="8100000" algn="bl" rotWithShape="0">
               <a:srgbClr val="000000">
                 <a:alpha val="12000"/>
               </a:srgbClr>
@@ -6494,7 +6248,7 @@
           <a:bodyPr wrap="square" lIns="0" tIns="0" rIns="0" bIns="0" rtlCol="0" anchor="ctr"/>
           <a:lstStyle/>
           <a:p>
-            <a:pPr algn="ctr" indent="0" marL="0">
+            <a:pPr marL="0" indent="0" algn="ctr">
               <a:buNone/>
             </a:pPr>
             <a:r>
@@ -6558,7 +6312,7 @@
           <a:bodyPr wrap="square" lIns="0" tIns="0" rIns="0" bIns="0" rtlCol="0" anchor="ctr"/>
           <a:lstStyle/>
           <a:p>
-            <a:pPr algn="ctr" indent="0" marL="0">
+            <a:pPr marL="0" indent="0" algn="ctr">
               <a:buNone/>
             </a:pPr>
             <a:r>
@@ -6597,7 +6351,7 @@
           <a:bodyPr wrap="square" lIns="0" tIns="0" rIns="0" bIns="0" rtlCol="0" anchor="ctr"/>
           <a:lstStyle/>
           <a:p>
-            <a:pPr indent="0" marL="0">
+            <a:pPr marL="0" indent="0">
               <a:buNone/>
             </a:pPr>
             <a:r>
@@ -6636,11 +6390,11 @@
           <a:bodyPr wrap="square" lIns="0" tIns="0" rIns="0" bIns="0" rtlCol="0" anchor="ctr"/>
           <a:lstStyle/>
           <a:p>
-            <a:pPr indent="0" marL="0">
-              <a:buNone/>
-            </a:pPr>
-            <a:r>
-              <a:rPr lang="en-US" sz="1300" i="1" dirty="0">
+            <a:pPr marL="0" indent="0">
+              <a:buNone/>
+            </a:pPr>
+            <a:r>
+              <a:rPr lang="en-US" sz="1300" i="1">
                 <a:solidFill>
                   <a:srgbClr val="B5D4F4"/>
                 </a:solidFill>
@@ -6648,7 +6402,7 @@
                 <a:ea typeface="Calibri" pitchFamily="34" charset="-122"/>
                 <a:cs typeface="Calibri" pitchFamily="34" charset="-120"/>
               </a:rPr>
-              <a:t>[ FEATURE 1 ]</a:t>
+              <a:t>Surprise recommendation by Genre</a:t>
             </a:r>
             <a:endParaRPr lang="en-US" sz="1300" dirty="0"/>
           </a:p>
@@ -6675,7 +6429,7 @@
           <a:bodyPr wrap="square" lIns="0" tIns="0" rIns="0" bIns="0" rtlCol="0" anchor="ctr"/>
           <a:lstStyle/>
           <a:p>
-            <a:pPr indent="0" marL="0">
+            <a:pPr marL="0" indent="0">
               <a:buNone/>
             </a:pPr>
             <a:r>
@@ -6714,7 +6468,7 @@
           <a:bodyPr wrap="square" lIns="0" tIns="0" rIns="0" bIns="0" rtlCol="0" anchor="ctr"/>
           <a:lstStyle/>
           <a:p>
-            <a:pPr indent="0" marL="0">
+            <a:pPr marL="0" indent="0">
               <a:buNone/>
             </a:pPr>
             <a:r>
@@ -6753,7 +6507,7 @@
           <a:bodyPr wrap="square" lIns="0" tIns="0" rIns="0" bIns="0" rtlCol="0" anchor="ctr"/>
           <a:lstStyle/>
           <a:p>
-            <a:pPr indent="0" marL="0">
+            <a:pPr marL="0" indent="0">
               <a:buNone/>
             </a:pPr>
             <a:r>
@@ -6792,7 +6546,7 @@
           <a:bodyPr wrap="square" lIns="0" tIns="0" rIns="0" bIns="0" rtlCol="0" anchor="ctr"/>
           <a:lstStyle/>
           <a:p>
-            <a:pPr indent="0" marL="0">
+            <a:pPr marL="0" indent="0">
               <a:buNone/>
             </a:pPr>
             <a:r>
@@ -6826,6 +6580,7 @@
         <a:solidFill>
           <a:srgbClr val="F1EFE8"/>
         </a:solidFill>
+        <a:effectLst/>
       </p:bgPr>
     </p:bg>
     <p:spTree>
@@ -6888,7 +6643,7 @@
           <a:bodyPr wrap="square" lIns="0" tIns="0" rIns="0" bIns="0" rtlCol="0" anchor="ctr"/>
           <a:lstStyle/>
           <a:p>
-            <a:pPr indent="0" marL="0">
+            <a:pPr marL="0" indent="0">
               <a:buNone/>
             </a:pPr>
             <a:r>
@@ -6952,7 +6707,7 @@
           <a:bodyPr wrap="square" lIns="0" tIns="0" rIns="0" bIns="0" rtlCol="0" anchor="ctr"/>
           <a:lstStyle/>
           <a:p>
-            <a:pPr indent="0" marL="0">
+            <a:pPr marL="0" indent="0">
               <a:buNone/>
             </a:pPr>
             <a:r>
@@ -6991,7 +6746,7 @@
           <a:bodyPr wrap="square" lIns="0" tIns="0" rIns="0" bIns="0" rtlCol="0" anchor="ctr"/>
           <a:lstStyle/>
           <a:p>
-            <a:pPr indent="0" marL="0">
+            <a:pPr marL="0" indent="0">
               <a:buNone/>
             </a:pPr>
             <a:r>
@@ -7030,7 +6785,7 @@
           <a:bodyPr wrap="square" lIns="0" tIns="0" rIns="0" bIns="0" rtlCol="0" anchor="ctr"/>
           <a:lstStyle/>
           <a:p>
-            <a:pPr indent="0" marL="0">
+            <a:pPr marL="0" indent="0">
               <a:buNone/>
             </a:pPr>
             <a:r>
@@ -7069,7 +6824,7 @@
           <a:bodyPr wrap="square" lIns="0" tIns="0" rIns="0" bIns="0" rtlCol="0" anchor="ctr"/>
           <a:lstStyle/>
           <a:p>
-            <a:pPr indent="0" marL="0">
+            <a:pPr marL="0" indent="0">
               <a:buNone/>
             </a:pPr>
             <a:r>
@@ -7108,7 +6863,7 @@
           <a:bodyPr wrap="square" lIns="0" tIns="0" rIns="0" bIns="0" rtlCol="0" anchor="ctr"/>
           <a:lstStyle/>
           <a:p>
-            <a:pPr indent="0" marL="0">
+            <a:pPr marL="0" indent="0">
               <a:buNone/>
             </a:pPr>
             <a:r>
@@ -7147,7 +6902,7 @@
           <a:bodyPr wrap="square" lIns="0" tIns="0" rIns="0" bIns="0" rtlCol="0" anchor="ctr"/>
           <a:lstStyle/>
           <a:p>
-            <a:pPr indent="0" marL="0">
+            <a:pPr marL="0" indent="0">
               <a:buNone/>
             </a:pPr>
             <a:r>
@@ -7211,7 +6966,7 @@
           <a:bodyPr wrap="square" lIns="0" tIns="0" rIns="0" bIns="0" rtlCol="0" anchor="ctr"/>
           <a:lstStyle/>
           <a:p>
-            <a:pPr indent="0" marL="0">
+            <a:pPr marL="0" indent="0">
               <a:buNone/>
             </a:pPr>
             <a:r>
@@ -7250,7 +7005,7 @@
           <a:bodyPr wrap="square" lIns="0" tIns="0" rIns="0" bIns="0" rtlCol="0" anchor="ctr"/>
           <a:lstStyle/>
           <a:p>
-            <a:pPr indent="0" marL="0">
+            <a:pPr marL="0" indent="0">
               <a:buNone/>
             </a:pPr>
             <a:r>
@@ -7289,7 +7044,7 @@
           <a:bodyPr wrap="square" lIns="0" tIns="0" rIns="0" bIns="0" rtlCol="0" anchor="ctr"/>
           <a:lstStyle/>
           <a:p>
-            <a:pPr indent="0" marL="0">
+            <a:pPr marL="0" indent="0">
               <a:buNone/>
             </a:pPr>
             <a:r>
@@ -7328,7 +7083,7 @@
           <a:bodyPr wrap="square" lIns="0" tIns="0" rIns="0" bIns="0" rtlCol="0" anchor="ctr"/>
           <a:lstStyle/>
           <a:p>
-            <a:pPr indent="0" marL="0">
+            <a:pPr marL="0" indent="0">
               <a:buNone/>
             </a:pPr>
             <a:r>
@@ -7367,7 +7122,7 @@
           <a:bodyPr wrap="square" lIns="0" tIns="0" rIns="0" bIns="0" rtlCol="0" anchor="ctr"/>
           <a:lstStyle/>
           <a:p>
-            <a:pPr indent="0" marL="0">
+            <a:pPr marL="0" indent="0">
               <a:buNone/>
             </a:pPr>
             <a:r>
@@ -7406,7 +7161,7 @@
           <a:bodyPr wrap="square" lIns="0" tIns="0" rIns="0" bIns="0" rtlCol="0" anchor="ctr"/>
           <a:lstStyle/>
           <a:p>
-            <a:pPr indent="0" marL="0">
+            <a:pPr marL="0" indent="0">
               <a:buNone/>
             </a:pPr>
             <a:r>
@@ -7445,7 +7200,7 @@
           <a:bodyPr wrap="square" lIns="0" tIns="0" rIns="0" bIns="0" rtlCol="0" anchor="ctr"/>
           <a:lstStyle/>
           <a:p>
-            <a:pPr indent="0" marL="0">
+            <a:pPr marL="0" indent="0">
               <a:buNone/>
             </a:pPr>
             <a:r>
@@ -7479,6 +7234,7 @@
         <a:solidFill>
           <a:srgbClr val="0C447C"/>
         </a:solidFill>
+        <a:effectLst/>
       </p:bgPr>
     </p:bg>
     <p:spTree>
@@ -7516,7 +7272,7 @@
           <a:bodyPr wrap="square" lIns="0" tIns="0" rIns="0" bIns="0" rtlCol="0" anchor="ctr"/>
           <a:lstStyle/>
           <a:p>
-            <a:pPr indent="0" marL="0">
+            <a:pPr marL="0" indent="0">
               <a:buNone/>
             </a:pPr>
             <a:r>
@@ -7583,7 +7339,7 @@
             <a:prstDash val="solid"/>
           </a:ln>
           <a:effectLst>
-            <a:outerShdw sx="100000" sy="100000" kx="0" ky="0" algn="bl" rotWithShape="0" blurRad="101600" dist="38100" dir="8100000">
+            <a:outerShdw blurRad="101600" dist="38100" dir="8100000" algn="bl" rotWithShape="0">
               <a:srgbClr val="000000">
                 <a:alpha val="12000"/>
               </a:srgbClr>
@@ -7612,7 +7368,7 @@
           <a:bodyPr wrap="square" lIns="0" tIns="0" rIns="0" bIns="0" rtlCol="0" anchor="ctr"/>
           <a:lstStyle/>
           <a:p>
-            <a:pPr indent="0" marL="0">
+            <a:pPr marL="0" indent="0">
               <a:buNone/>
             </a:pPr>
             <a:r>
@@ -7651,7 +7407,7 @@
           <a:bodyPr wrap="square" lIns="0" tIns="0" rIns="0" bIns="0" rtlCol="0" anchor="ctr"/>
           <a:lstStyle/>
           <a:p>
-            <a:pPr indent="0" marL="0">
+            <a:pPr marL="0" indent="0">
               <a:buNone/>
             </a:pPr>
             <a:r>
@@ -7690,7 +7446,7 @@
           <a:bodyPr wrap="square" lIns="0" tIns="0" rIns="0" bIns="0" rtlCol="0" anchor="ctr"/>
           <a:lstStyle/>
           <a:p>
-            <a:pPr indent="0" marL="0">
+            <a:pPr marL="0" indent="0">
               <a:buNone/>
             </a:pPr>
             <a:r>
@@ -7732,7 +7488,7 @@
             <a:prstDash val="solid"/>
           </a:ln>
           <a:effectLst>
-            <a:outerShdw sx="100000" sy="100000" kx="0" ky="0" algn="bl" rotWithShape="0" blurRad="101600" dist="38100" dir="8100000">
+            <a:outerShdw blurRad="101600" dist="38100" dir="8100000" algn="bl" rotWithShape="0">
               <a:srgbClr val="000000">
                 <a:alpha val="12000"/>
               </a:srgbClr>
@@ -7761,7 +7517,7 @@
           <a:bodyPr wrap="square" lIns="0" tIns="0" rIns="0" bIns="0" rtlCol="0" anchor="ctr"/>
           <a:lstStyle/>
           <a:p>
-            <a:pPr indent="0" marL="0">
+            <a:pPr marL="0" indent="0">
               <a:buNone/>
             </a:pPr>
             <a:r>
@@ -7800,7 +7556,7 @@
           <a:bodyPr wrap="square" lIns="0" tIns="0" rIns="0" bIns="0" rtlCol="0" anchor="ctr"/>
           <a:lstStyle/>
           <a:p>
-            <a:pPr indent="0" marL="0">
+            <a:pPr marL="0" indent="0">
               <a:buNone/>
             </a:pPr>
             <a:r>
@@ -7839,7 +7595,7 @@
           <a:bodyPr wrap="square" lIns="0" tIns="0" rIns="0" bIns="0" rtlCol="0" anchor="ctr"/>
           <a:lstStyle/>
           <a:p>
-            <a:pPr indent="0" marL="0">
+            <a:pPr marL="0" indent="0">
               <a:buNone/>
             </a:pPr>
             <a:r>
@@ -7881,7 +7637,7 @@
             <a:prstDash val="solid"/>
           </a:ln>
           <a:effectLst>
-            <a:outerShdw sx="100000" sy="100000" kx="0" ky="0" algn="bl" rotWithShape="0" blurRad="101600" dist="38100" dir="8100000">
+            <a:outerShdw blurRad="101600" dist="38100" dir="8100000" algn="bl" rotWithShape="0">
               <a:srgbClr val="000000">
                 <a:alpha val="12000"/>
               </a:srgbClr>
@@ -7910,7 +7666,7 @@
           <a:bodyPr wrap="square" lIns="0" tIns="0" rIns="0" bIns="0" rtlCol="0" anchor="ctr"/>
           <a:lstStyle/>
           <a:p>
-            <a:pPr indent="0" marL="0">
+            <a:pPr marL="0" indent="0">
               <a:buNone/>
             </a:pPr>
             <a:r>
@@ -7949,7 +7705,7 @@
           <a:bodyPr wrap="square" lIns="0" tIns="0" rIns="0" bIns="0" rtlCol="0" anchor="ctr"/>
           <a:lstStyle/>
           <a:p>
-            <a:pPr indent="0" marL="0">
+            <a:pPr marL="0" indent="0">
               <a:buNone/>
             </a:pPr>
             <a:r>
@@ -7988,7 +7744,7 @@
           <a:bodyPr wrap="square" lIns="0" tIns="0" rIns="0" bIns="0" rtlCol="0" anchor="ctr"/>
           <a:lstStyle/>
           <a:p>
-            <a:pPr indent="0" marL="0">
+            <a:pPr marL="0" indent="0">
               <a:buNone/>
             </a:pPr>
             <a:r>
@@ -8030,7 +7786,7 @@
             <a:prstDash val="solid"/>
           </a:ln>
           <a:effectLst>
-            <a:outerShdw sx="100000" sy="100000" kx="0" ky="0" algn="bl" rotWithShape="0" blurRad="101600" dist="38100" dir="8100000">
+            <a:outerShdw blurRad="101600" dist="38100" dir="8100000" algn="bl" rotWithShape="0">
               <a:srgbClr val="000000">
                 <a:alpha val="12000"/>
               </a:srgbClr>
@@ -8059,7 +7815,7 @@
           <a:bodyPr wrap="square" lIns="0" tIns="0" rIns="0" bIns="0" rtlCol="0" anchor="ctr"/>
           <a:lstStyle/>
           <a:p>
-            <a:pPr indent="0" marL="0">
+            <a:pPr marL="0" indent="0">
               <a:buNone/>
             </a:pPr>
             <a:r>
@@ -8098,7 +7854,7 @@
           <a:bodyPr wrap="square" lIns="0" tIns="0" rIns="0" bIns="0" rtlCol="0" anchor="ctr"/>
           <a:lstStyle/>
           <a:p>
-            <a:pPr indent="0" marL="0">
+            <a:pPr marL="0" indent="0">
               <a:buNone/>
             </a:pPr>
             <a:r>
@@ -8137,7 +7893,7 @@
           <a:bodyPr wrap="square" lIns="0" tIns="0" rIns="0" bIns="0" rtlCol="0" anchor="ctr"/>
           <a:lstStyle/>
           <a:p>
-            <a:pPr indent="0" marL="0">
+            <a:pPr marL="0" indent="0">
               <a:buNone/>
             </a:pPr>
             <a:r>
@@ -8456,4 +8212,299 @@
     </a:ext>
   </a:extLst>
 </a:theme>
+</file>
+
+<file path=ppt/theme/theme2.xml><?xml version="1.0" encoding="utf-8"?>
+<a:theme xmlns:a="http://schemas.openxmlformats.org/drawingml/2006/main" name="Tema do Office">
+  <a:themeElements>
+    <a:clrScheme name="Office">
+      <a:dk1>
+        <a:sysClr val="windowText" lastClr="000000"/>
+      </a:dk1>
+      <a:lt1>
+        <a:sysClr val="window" lastClr="FFFFFF"/>
+      </a:lt1>
+      <a:dk2>
+        <a:srgbClr val="44546A"/>
+      </a:dk2>
+      <a:lt2>
+        <a:srgbClr val="E7E6E6"/>
+      </a:lt2>
+      <a:accent1>
+        <a:srgbClr val="4472C4"/>
+      </a:accent1>
+      <a:accent2>
+        <a:srgbClr val="ED7D31"/>
+      </a:accent2>
+      <a:accent3>
+        <a:srgbClr val="A5A5A5"/>
+      </a:accent3>
+      <a:accent4>
+        <a:srgbClr val="FFC000"/>
+      </a:accent4>
+      <a:accent5>
+        <a:srgbClr val="5B9BD5"/>
+      </a:accent5>
+      <a:accent6>
+        <a:srgbClr val="70AD47"/>
+      </a:accent6>
+      <a:hlink>
+        <a:srgbClr val="0563C1"/>
+      </a:hlink>
+      <a:folHlink>
+        <a:srgbClr val="954F72"/>
+      </a:folHlink>
+    </a:clrScheme>
+    <a:fontScheme name="Office">
+      <a:majorFont>
+        <a:latin typeface="Calibri Light" panose="020F0302020204030204"/>
+        <a:ea typeface=""/>
+        <a:cs typeface=""/>
+        <a:font script="Jpan" typeface="游ゴシック Light"/>
+        <a:font script="Hang" typeface="맑은 고딕"/>
+        <a:font script="Hans" typeface="等线 Light"/>
+        <a:font script="Hant" typeface="新細明體"/>
+        <a:font script="Arab" typeface="Times New Roman"/>
+        <a:font script="Hebr" typeface="Times New Roman"/>
+        <a:font script="Thai" typeface="Angsana New"/>
+        <a:font script="Ethi" typeface="Nyala"/>
+        <a:font script="Beng" typeface="Vrinda"/>
+        <a:font script="Gujr" typeface="Shruti"/>
+        <a:font script="Khmr" typeface="MoolBoran"/>
+        <a:font script="Knda" typeface="Tunga"/>
+        <a:font script="Guru" typeface="Raavi"/>
+        <a:font script="Cans" typeface="Euphemia"/>
+        <a:font script="Cher" typeface="Plantagenet Cherokee"/>
+        <a:font script="Yiii" typeface="Microsoft Yi Baiti"/>
+        <a:font script="Tibt" typeface="Microsoft Himalaya"/>
+        <a:font script="Thaa" typeface="MV Boli"/>
+        <a:font script="Deva" typeface="Mangal"/>
+        <a:font script="Telu" typeface="Gautami"/>
+        <a:font script="Taml" typeface="Latha"/>
+        <a:font script="Syrc" typeface="Estrangelo Edessa"/>
+        <a:font script="Orya" typeface="Kalinga"/>
+        <a:font script="Mlym" typeface="Kartika"/>
+        <a:font script="Laoo" typeface="DokChampa"/>
+        <a:font script="Sinh" typeface="Iskoola Pota"/>
+        <a:font script="Mong" typeface="Mongolian Baiti"/>
+        <a:font script="Viet" typeface="Times New Roman"/>
+        <a:font script="Uigh" typeface="Microsoft Uighur"/>
+        <a:font script="Geor" typeface="Sylfaen"/>
+        <a:font script="Armn" typeface="Arial"/>
+        <a:font script="Bugi" typeface="Leelawadee UI"/>
+        <a:font script="Bopo" typeface="Microsoft JhengHei"/>
+        <a:font script="Java" typeface="Javanese Text"/>
+        <a:font script="Lisu" typeface="Segoe UI"/>
+        <a:font script="Mymr" typeface="Myanmar Text"/>
+        <a:font script="Nkoo" typeface="Ebrima"/>
+        <a:font script="Olck" typeface="Nirmala UI"/>
+        <a:font script="Osma" typeface="Ebrima"/>
+        <a:font script="Phag" typeface="Phagspa"/>
+        <a:font script="Syrn" typeface="Estrangelo Edessa"/>
+        <a:font script="Syrj" typeface="Estrangelo Edessa"/>
+        <a:font script="Syre" typeface="Estrangelo Edessa"/>
+        <a:font script="Sora" typeface="Nirmala UI"/>
+        <a:font script="Tale" typeface="Microsoft Tai Le"/>
+        <a:font script="Talu" typeface="Microsoft New Tai Lue"/>
+        <a:font script="Tfng" typeface="Ebrima"/>
+      </a:majorFont>
+      <a:minorFont>
+        <a:latin typeface="Calibri" panose="020F0502020204030204"/>
+        <a:ea typeface=""/>
+        <a:cs typeface=""/>
+        <a:font script="Jpan" typeface="游ゴシック"/>
+        <a:font script="Hang" typeface="맑은 고딕"/>
+        <a:font script="Hans" typeface="等线"/>
+        <a:font script="Hant" typeface="新細明體"/>
+        <a:font script="Arab" typeface="Arial"/>
+        <a:font script="Hebr" typeface="Arial"/>
+        <a:font script="Thai" typeface="Cordia New"/>
+        <a:font script="Ethi" typeface="Nyala"/>
+        <a:font script="Beng" typeface="Vrinda"/>
+        <a:font script="Gujr" typeface="Shruti"/>
+        <a:font script="Khmr" typeface="DaunPenh"/>
+        <a:font script="Knda" typeface="Tunga"/>
+        <a:font script="Guru" typeface="Raavi"/>
+        <a:font script="Cans" typeface="Euphemia"/>
+        <a:font script="Cher" typeface="Plantagenet Cherokee"/>
+        <a:font script="Yiii" typeface="Microsoft Yi Baiti"/>
+        <a:font script="Tibt" typeface="Microsoft Himalaya"/>
+        <a:font script="Thaa" typeface="MV Boli"/>
+        <a:font script="Deva" typeface="Mangal"/>
+        <a:font script="Telu" typeface="Gautami"/>
+        <a:font script="Taml" typeface="Latha"/>
+        <a:font script="Syrc" typeface="Estrangelo Edessa"/>
+        <a:font script="Orya" typeface="Kalinga"/>
+        <a:font script="Mlym" typeface="Kartika"/>
+        <a:font script="Laoo" typeface="DokChampa"/>
+        <a:font script="Sinh" typeface="Iskoola Pota"/>
+        <a:font script="Mong" typeface="Mongolian Baiti"/>
+        <a:font script="Viet" typeface="Arial"/>
+        <a:font script="Uigh" typeface="Microsoft Uighur"/>
+        <a:font script="Geor" typeface="Sylfaen"/>
+        <a:font script="Armn" typeface="Arial"/>
+        <a:font script="Bugi" typeface="Leelawadee UI"/>
+        <a:font script="Bopo" typeface="Microsoft JhengHei"/>
+        <a:font script="Java" typeface="Javanese Text"/>
+        <a:font script="Lisu" typeface="Segoe UI"/>
+        <a:font script="Mymr" typeface="Myanmar Text"/>
+        <a:font script="Nkoo" typeface="Ebrima"/>
+        <a:font script="Olck" typeface="Nirmala UI"/>
+        <a:font script="Osma" typeface="Ebrima"/>
+        <a:font script="Phag" typeface="Phagspa"/>
+        <a:font script="Syrn" typeface="Estrangelo Edessa"/>
+        <a:font script="Syrj" typeface="Estrangelo Edessa"/>
+        <a:font script="Syre" typeface="Estrangelo Edessa"/>
+        <a:font script="Sora" typeface="Nirmala UI"/>
+        <a:font script="Tale" typeface="Microsoft Tai Le"/>
+        <a:font script="Talu" typeface="Microsoft New Tai Lue"/>
+        <a:font script="Tfng" typeface="Ebrima"/>
+      </a:minorFont>
+    </a:fontScheme>
+    <a:fmtScheme name="Office">
+      <a:fillStyleLst>
+        <a:solidFill>
+          <a:schemeClr val="phClr"/>
+        </a:solidFill>
+        <a:gradFill rotWithShape="1">
+          <a:gsLst>
+            <a:gs pos="0">
+              <a:schemeClr val="phClr">
+                <a:lumMod val="110000"/>
+                <a:satMod val="105000"/>
+                <a:tint val="67000"/>
+              </a:schemeClr>
+            </a:gs>
+            <a:gs pos="50000">
+              <a:schemeClr val="phClr">
+                <a:lumMod val="105000"/>
+                <a:satMod val="103000"/>
+                <a:tint val="73000"/>
+              </a:schemeClr>
+            </a:gs>
+            <a:gs pos="100000">
+              <a:schemeClr val="phClr">
+                <a:lumMod val="105000"/>
+                <a:satMod val="109000"/>
+                <a:tint val="81000"/>
+              </a:schemeClr>
+            </a:gs>
+          </a:gsLst>
+          <a:lin ang="5400000" scaled="0"/>
+        </a:gradFill>
+        <a:gradFill rotWithShape="1">
+          <a:gsLst>
+            <a:gs pos="0">
+              <a:schemeClr val="phClr">
+                <a:satMod val="103000"/>
+                <a:lumMod val="102000"/>
+                <a:tint val="94000"/>
+              </a:schemeClr>
+            </a:gs>
+            <a:gs pos="50000">
+              <a:schemeClr val="phClr">
+                <a:satMod val="110000"/>
+                <a:lumMod val="100000"/>
+                <a:shade val="100000"/>
+              </a:schemeClr>
+            </a:gs>
+            <a:gs pos="100000">
+              <a:schemeClr val="phClr">
+                <a:lumMod val="99000"/>
+                <a:satMod val="120000"/>
+                <a:shade val="78000"/>
+              </a:schemeClr>
+            </a:gs>
+          </a:gsLst>
+          <a:lin ang="5400000" scaled="0"/>
+        </a:gradFill>
+      </a:fillStyleLst>
+      <a:lnStyleLst>
+        <a:ln w="6350" cap="flat" cmpd="sng" algn="ctr">
+          <a:solidFill>
+            <a:schemeClr val="phClr"/>
+          </a:solidFill>
+          <a:prstDash val="solid"/>
+          <a:miter lim="800000"/>
+        </a:ln>
+        <a:ln w="12700" cap="flat" cmpd="sng" algn="ctr">
+          <a:solidFill>
+            <a:schemeClr val="phClr"/>
+          </a:solidFill>
+          <a:prstDash val="solid"/>
+          <a:miter lim="800000"/>
+        </a:ln>
+        <a:ln w="19050" cap="flat" cmpd="sng" algn="ctr">
+          <a:solidFill>
+            <a:schemeClr val="phClr"/>
+          </a:solidFill>
+          <a:prstDash val="solid"/>
+          <a:miter lim="800000"/>
+        </a:ln>
+      </a:lnStyleLst>
+      <a:effectStyleLst>
+        <a:effectStyle>
+          <a:effectLst/>
+        </a:effectStyle>
+        <a:effectStyle>
+          <a:effectLst/>
+        </a:effectStyle>
+        <a:effectStyle>
+          <a:effectLst>
+            <a:outerShdw blurRad="57150" dist="19050" dir="5400000" algn="ctr" rotWithShape="0">
+              <a:srgbClr val="000000">
+                <a:alpha val="63000"/>
+              </a:srgbClr>
+            </a:outerShdw>
+          </a:effectLst>
+        </a:effectStyle>
+      </a:effectStyleLst>
+      <a:bgFillStyleLst>
+        <a:solidFill>
+          <a:schemeClr val="phClr"/>
+        </a:solidFill>
+        <a:solidFill>
+          <a:schemeClr val="phClr">
+            <a:tint val="95000"/>
+            <a:satMod val="170000"/>
+          </a:schemeClr>
+        </a:solidFill>
+        <a:gradFill rotWithShape="1">
+          <a:gsLst>
+            <a:gs pos="0">
+              <a:schemeClr val="phClr">
+                <a:tint val="93000"/>
+                <a:satMod val="150000"/>
+                <a:shade val="98000"/>
+                <a:lumMod val="102000"/>
+              </a:schemeClr>
+            </a:gs>
+            <a:gs pos="50000">
+              <a:schemeClr val="phClr">
+                <a:tint val="98000"/>
+                <a:satMod val="130000"/>
+                <a:shade val="90000"/>
+                <a:lumMod val="103000"/>
+              </a:schemeClr>
+            </a:gs>
+            <a:gs pos="100000">
+              <a:schemeClr val="phClr">
+                <a:shade val="63000"/>
+                <a:satMod val="120000"/>
+              </a:schemeClr>
+            </a:gs>
+          </a:gsLst>
+          <a:lin ang="5400000" scaled="0"/>
+        </a:gradFill>
+      </a:bgFillStyleLst>
+    </a:fmtScheme>
+  </a:themeElements>
+  <a:objectDefaults/>
+  <a:extraClrSchemeLst/>
+  <a:extLst>
+    <a:ext uri="{05A4C25C-085E-4340-85A3-A5531E510DB2}">
+      <thm15:themeFamily xmlns:thm15="http://schemas.microsoft.com/office/thememl/2012/main" name="Office Theme" id="{62F939B6-93AF-4DB8-9C6B-D6C7DFDC589F}" vid="{4A3C46E8-61CC-4603-A589-7422A47A8E4A}"/>
+    </a:ext>
+  </a:extLst>
+</a:theme>
 </file>